--- a/downloads/slides/Lesson2_Slides.pptx
+++ b/downloads/slides/Lesson2_Slides.pptx
@@ -1389,13 +1389,13 @@
           <a:p>
             <a:r>
               <a:rPr lang="en-US" dirty="0"/>
-              <a:t>Image credit line copied exactly from images/CREDITS.md. Deck license: CC BY-NC-SA 4.0 (proposed curriculum license, Section 7.4).</a:t>
+              <a:t>Image credit line copied exactly from images/CREDITS.md. Deck notice: © 2026 the authors; the authors license this deck under CC BY-NC-SA 4.0 (Section 7.2).</a:t>
             </a:r>
           </a:p>
           <a:p>
             <a:r>
               <a:rPr lang="en-US" dirty="0"/>
-              <a:t>Independence notice from the curriculum front matter.</a:t>
+              <a:t>Audio and font credits: Chatterbox TTS (Resemble AI, MIT; Perth watermark), Lexend Deca (SIL OFL 1.1).</a:t>
             </a:r>
           </a:p>
         </p:txBody>
@@ -2775,6 +2775,10 @@
           </a:solidFill>
           <a:ln/>
         </p:spPr>
+        <p:txBody>
+          <a:bodyPr/>
+          <a:p/>
+        </p:txBody>
       </p:sp>
       <p:sp>
         <p:nvSpPr>
@@ -2836,6 +2840,10 @@
           </a:solidFill>
           <a:ln/>
         </p:spPr>
+        <p:txBody>
+          <a:bodyPr/>
+          <a:p/>
+        </p:txBody>
       </p:sp>
       <p:sp>
         <p:nvSpPr>
@@ -2858,6 +2866,10 @@
           </a:solidFill>
           <a:ln/>
         </p:spPr>
+        <p:txBody>
+          <a:bodyPr/>
+          <a:p/>
+        </p:txBody>
       </p:sp>
       <p:sp>
         <p:nvSpPr>
@@ -3038,6 +3050,10 @@
           </a:solidFill>
           <a:ln/>
         </p:spPr>
+        <p:txBody>
+          <a:bodyPr/>
+          <a:p/>
+        </p:txBody>
       </p:sp>
       <p:sp>
         <p:nvSpPr>
@@ -3058,6 +3074,10 @@
           </a:solidFill>
           <a:ln/>
         </p:spPr>
+        <p:txBody>
+          <a:bodyPr/>
+          <a:p/>
+        </p:txBody>
       </p:sp>
       <p:sp>
         <p:nvSpPr>
@@ -3078,6 +3098,10 @@
           </a:solidFill>
           <a:ln/>
         </p:spPr>
+        <p:txBody>
+          <a:bodyPr/>
+          <a:p/>
+        </p:txBody>
       </p:sp>
       <p:pic>
         <p:nvPicPr>
@@ -3161,6 +3185,10 @@
             <a:prstDash val="solid"/>
           </a:ln>
         </p:spPr>
+        <p:txBody>
+          <a:bodyPr/>
+          <a:p/>
+        </p:txBody>
       </p:sp>
       <p:sp>
         <p:nvSpPr>
@@ -3183,6 +3211,10 @@
           </a:solidFill>
           <a:ln/>
         </p:spPr>
+        <p:txBody>
+          <a:bodyPr/>
+          <a:p/>
+        </p:txBody>
       </p:sp>
       <p:sp>
         <p:nvSpPr>
@@ -3205,6 +3237,10 @@
           </a:solidFill>
           <a:ln/>
         </p:spPr>
+        <p:txBody>
+          <a:bodyPr/>
+          <a:p/>
+        </p:txBody>
       </p:sp>
       <p:sp>
         <p:nvSpPr>
@@ -3305,6 +3341,10 @@
             <a:prstDash val="solid"/>
           </a:ln>
         </p:spPr>
+        <p:txBody>
+          <a:bodyPr/>
+          <a:p/>
+        </p:txBody>
       </p:sp>
       <p:sp>
         <p:nvSpPr>
@@ -3325,6 +3365,10 @@
           </a:solidFill>
           <a:ln/>
         </p:spPr>
+        <p:txBody>
+          <a:bodyPr/>
+          <a:p/>
+        </p:txBody>
       </p:sp>
       <p:sp>
         <p:nvSpPr>
@@ -3345,6 +3389,10 @@
           </a:solidFill>
           <a:ln/>
         </p:spPr>
+        <p:txBody>
+          <a:bodyPr/>
+          <a:p/>
+        </p:txBody>
       </p:sp>
       <p:sp>
         <p:nvSpPr>
@@ -3365,6 +3413,10 @@
           </a:solidFill>
           <a:ln/>
         </p:spPr>
+        <p:txBody>
+          <a:bodyPr/>
+          <a:p/>
+        </p:txBody>
       </p:sp>
       <p:pic>
         <p:nvPicPr>
@@ -4181,6 +4233,10 @@
           </a:solidFill>
           <a:ln/>
         </p:spPr>
+        <p:txBody>
+          <a:bodyPr/>
+          <a:p/>
+        </p:txBody>
       </p:sp>
       <p:sp>
         <p:nvSpPr>
@@ -4203,6 +4259,10 @@
           </a:solidFill>
           <a:ln/>
         </p:spPr>
+        <p:txBody>
+          <a:bodyPr/>
+          <a:p/>
+        </p:txBody>
       </p:sp>
       <p:sp>
         <p:nvSpPr>
@@ -4225,6 +4285,10 @@
           </a:solidFill>
           <a:ln/>
         </p:spPr>
+        <p:txBody>
+          <a:bodyPr/>
+          <a:p/>
+        </p:txBody>
       </p:sp>
       <p:sp>
         <p:nvSpPr>
@@ -4247,6 +4311,10 @@
           </a:solidFill>
           <a:ln/>
         </p:spPr>
+        <p:txBody>
+          <a:bodyPr/>
+          <a:p/>
+        </p:txBody>
       </p:sp>
       <p:sp>
         <p:nvSpPr>
@@ -4269,6 +4337,10 @@
           </a:solidFill>
           <a:ln/>
         </p:spPr>
+        <p:txBody>
+          <a:bodyPr/>
+          <a:p/>
+        </p:txBody>
       </p:sp>
       <p:sp>
         <p:nvSpPr>
@@ -5829,6 +5901,10 @@
             <a:prstDash val="solid"/>
           </a:ln>
         </p:spPr>
+        <p:txBody>
+          <a:bodyPr/>
+          <a:p/>
+        </p:txBody>
       </p:sp>
       <p:sp>
         <p:nvSpPr>
@@ -5849,6 +5925,10 @@
           </a:solidFill>
           <a:ln/>
         </p:spPr>
+        <p:txBody>
+          <a:bodyPr/>
+          <a:p/>
+        </p:txBody>
       </p:sp>
       <p:sp>
         <p:nvSpPr>
@@ -5871,6 +5951,10 @@
           </a:solidFill>
           <a:ln/>
         </p:spPr>
+        <p:txBody>
+          <a:bodyPr/>
+          <a:p/>
+        </p:txBody>
       </p:sp>
       <p:sp>
         <p:nvSpPr>
@@ -5893,6 +5977,10 @@
           </a:solidFill>
           <a:ln/>
         </p:spPr>
+        <p:txBody>
+          <a:bodyPr/>
+          <a:p/>
+        </p:txBody>
       </p:sp>
       <p:sp>
         <p:nvSpPr>
@@ -5915,6 +6003,10 @@
           </a:solidFill>
           <a:ln/>
         </p:spPr>
+        <p:txBody>
+          <a:bodyPr/>
+          <a:p/>
+        </p:txBody>
       </p:sp>
       <p:sp>
         <p:nvSpPr>
@@ -5937,6 +6029,10 @@
           </a:solidFill>
           <a:ln/>
         </p:spPr>
+        <p:txBody>
+          <a:bodyPr/>
+          <a:p/>
+        </p:txBody>
       </p:sp>
       <p:sp>
         <p:nvSpPr>
@@ -5959,6 +6055,10 @@
           </a:solidFill>
           <a:ln/>
         </p:spPr>
+        <p:txBody>
+          <a:bodyPr/>
+          <a:p/>
+        </p:txBody>
       </p:sp>
       <p:sp>
         <p:nvSpPr>
@@ -5981,6 +6081,10 @@
           </a:solidFill>
           <a:ln/>
         </p:spPr>
+        <p:txBody>
+          <a:bodyPr/>
+          <a:p/>
+        </p:txBody>
       </p:sp>
       <p:sp>
         <p:nvSpPr>
@@ -6040,6 +6144,10 @@
           </a:solidFill>
           <a:ln/>
         </p:spPr>
+        <p:txBody>
+          <a:bodyPr/>
+          <a:p/>
+        </p:txBody>
       </p:sp>
       <p:sp>
         <p:nvSpPr>
@@ -6060,6 +6168,10 @@
           </a:solidFill>
           <a:ln/>
         </p:spPr>
+        <p:txBody>
+          <a:bodyPr/>
+          <a:p/>
+        </p:txBody>
       </p:sp>
       <p:sp>
         <p:nvSpPr>
@@ -6080,6 +6192,10 @@
           </a:solidFill>
           <a:ln/>
         </p:spPr>
+        <p:txBody>
+          <a:bodyPr/>
+          <a:p/>
+        </p:txBody>
       </p:sp>
       <p:pic>
         <p:nvPicPr>
@@ -6762,6 +6878,10 @@
             <a:prstDash val="solid"/>
           </a:ln>
         </p:spPr>
+        <p:txBody>
+          <a:bodyPr/>
+          <a:p/>
+        </p:txBody>
       </p:sp>
       <p:sp>
         <p:nvSpPr>
@@ -6782,6 +6902,10 @@
           </a:solidFill>
           <a:ln/>
         </p:spPr>
+        <p:txBody>
+          <a:bodyPr/>
+          <a:p/>
+        </p:txBody>
       </p:sp>
       <p:sp>
         <p:nvSpPr>
@@ -6804,6 +6928,10 @@
           </a:solidFill>
           <a:ln/>
         </p:spPr>
+        <p:txBody>
+          <a:bodyPr/>
+          <a:p/>
+        </p:txBody>
       </p:sp>
       <p:sp>
         <p:nvSpPr>
@@ -6826,6 +6954,10 @@
           </a:solidFill>
           <a:ln/>
         </p:spPr>
+        <p:txBody>
+          <a:bodyPr/>
+          <a:p/>
+        </p:txBody>
       </p:sp>
       <p:sp>
         <p:nvSpPr>
@@ -6848,6 +6980,10 @@
           </a:solidFill>
           <a:ln/>
         </p:spPr>
+        <p:txBody>
+          <a:bodyPr/>
+          <a:p/>
+        </p:txBody>
       </p:sp>
       <p:sp>
         <p:nvSpPr>
@@ -6870,6 +7006,10 @@
           </a:solidFill>
           <a:ln/>
         </p:spPr>
+        <p:txBody>
+          <a:bodyPr/>
+          <a:p/>
+        </p:txBody>
       </p:sp>
       <p:sp>
         <p:nvSpPr>
@@ -6892,6 +7032,10 @@
           </a:solidFill>
           <a:ln/>
         </p:spPr>
+        <p:txBody>
+          <a:bodyPr/>
+          <a:p/>
+        </p:txBody>
       </p:sp>
       <p:sp>
         <p:nvSpPr>
@@ -6914,6 +7058,10 @@
           </a:solidFill>
           <a:ln/>
         </p:spPr>
+        <p:txBody>
+          <a:bodyPr/>
+          <a:p/>
+        </p:txBody>
       </p:sp>
       <p:sp>
         <p:nvSpPr>
@@ -6973,6 +7121,10 @@
           </a:solidFill>
           <a:ln/>
         </p:spPr>
+        <p:txBody>
+          <a:bodyPr/>
+          <a:p/>
+        </p:txBody>
       </p:sp>
       <p:sp>
         <p:nvSpPr>
@@ -6993,6 +7145,10 @@
           </a:solidFill>
           <a:ln/>
         </p:spPr>
+        <p:txBody>
+          <a:bodyPr/>
+          <a:p/>
+        </p:txBody>
       </p:sp>
       <p:sp>
         <p:nvSpPr>
@@ -7013,6 +7169,10 @@
           </a:solidFill>
           <a:ln/>
         </p:spPr>
+        <p:txBody>
+          <a:bodyPr/>
+          <a:p/>
+        </p:txBody>
       </p:sp>
       <p:pic>
         <p:nvPicPr>
@@ -7768,6 +7928,10 @@
           </a:solidFill>
           <a:ln/>
         </p:spPr>
+        <p:txBody>
+          <a:bodyPr/>
+          <a:p/>
+        </p:txBody>
       </p:sp>
       <p:sp>
         <p:nvSpPr>
@@ -7795,6 +7959,10 @@
             <a:prstDash val="solid"/>
           </a:ln>
         </p:spPr>
+        <p:txBody>
+          <a:bodyPr/>
+          <a:p/>
+        </p:txBody>
       </p:sp>
       <p:sp>
         <p:nvSpPr>
@@ -7815,6 +7983,10 @@
           </a:solidFill>
           <a:ln/>
         </p:spPr>
+        <p:txBody>
+          <a:bodyPr/>
+          <a:p/>
+        </p:txBody>
       </p:sp>
       <p:sp>
         <p:nvSpPr>
@@ -7915,6 +8087,10 @@
           </a:solidFill>
           <a:ln/>
         </p:spPr>
+        <p:txBody>
+          <a:bodyPr/>
+          <a:p/>
+        </p:txBody>
       </p:sp>
       <p:sp>
         <p:nvSpPr>
@@ -7942,6 +8118,10 @@
             <a:prstDash val="solid"/>
           </a:ln>
         </p:spPr>
+        <p:txBody>
+          <a:bodyPr/>
+          <a:p/>
+        </p:txBody>
       </p:sp>
       <p:sp>
         <p:nvSpPr>
@@ -7962,6 +8142,10 @@
           </a:solidFill>
           <a:ln/>
         </p:spPr>
+        <p:txBody>
+          <a:bodyPr/>
+          <a:p/>
+        </p:txBody>
       </p:sp>
       <p:sp>
         <p:nvSpPr>
@@ -8062,6 +8246,10 @@
           </a:solidFill>
           <a:ln/>
         </p:spPr>
+        <p:txBody>
+          <a:bodyPr/>
+          <a:p/>
+        </p:txBody>
       </p:sp>
       <p:sp>
         <p:nvSpPr>
@@ -8089,6 +8277,10 @@
             <a:prstDash val="solid"/>
           </a:ln>
         </p:spPr>
+        <p:txBody>
+          <a:bodyPr/>
+          <a:p/>
+        </p:txBody>
       </p:sp>
       <p:sp>
         <p:nvSpPr>
@@ -8109,6 +8301,10 @@
           </a:solidFill>
           <a:ln/>
         </p:spPr>
+        <p:txBody>
+          <a:bodyPr/>
+          <a:p/>
+        </p:txBody>
       </p:sp>
       <p:sp>
         <p:nvSpPr>
@@ -8207,6 +8403,10 @@
           </a:solidFill>
           <a:ln/>
         </p:spPr>
+        <p:txBody>
+          <a:bodyPr/>
+          <a:p/>
+        </p:txBody>
       </p:sp>
       <p:sp>
         <p:nvSpPr>
@@ -8227,6 +8427,10 @@
           </a:solidFill>
           <a:ln/>
         </p:spPr>
+        <p:txBody>
+          <a:bodyPr/>
+          <a:p/>
+        </p:txBody>
       </p:sp>
       <p:sp>
         <p:nvSpPr>
@@ -8247,6 +8451,10 @@
           </a:solidFill>
           <a:ln/>
         </p:spPr>
+        <p:txBody>
+          <a:bodyPr/>
+          <a:p/>
+        </p:txBody>
       </p:sp>
       <p:sp>
         <p:nvSpPr>
@@ -8629,6 +8837,10 @@
           </a:solidFill>
           <a:ln/>
         </p:spPr>
+        <p:txBody>
+          <a:bodyPr/>
+          <a:p/>
+        </p:txBody>
       </p:sp>
       <p:sp>
         <p:nvSpPr>
@@ -8651,6 +8863,10 @@
           </a:solidFill>
           <a:ln/>
         </p:spPr>
+        <p:txBody>
+          <a:bodyPr/>
+          <a:p/>
+        </p:txBody>
       </p:sp>
       <p:sp>
         <p:nvSpPr>
@@ -8673,6 +8889,10 @@
           </a:solidFill>
           <a:ln/>
         </p:spPr>
+        <p:txBody>
+          <a:bodyPr/>
+          <a:p/>
+        </p:txBody>
       </p:sp>
       <p:sp>
         <p:nvSpPr>
@@ -8695,6 +8915,10 @@
           </a:solidFill>
           <a:ln/>
         </p:spPr>
+        <p:txBody>
+          <a:bodyPr/>
+          <a:p/>
+        </p:txBody>
       </p:sp>
       <p:sp>
         <p:nvSpPr>
@@ -8717,6 +8941,10 @@
           </a:solidFill>
           <a:ln/>
         </p:spPr>
+        <p:txBody>
+          <a:bodyPr/>
+          <a:p/>
+        </p:txBody>
       </p:sp>
       <p:sp>
         <p:nvSpPr>
@@ -9329,6 +9557,10 @@
             <a:prstDash val="solid"/>
           </a:ln>
         </p:spPr>
+        <p:txBody>
+          <a:bodyPr/>
+          <a:p/>
+        </p:txBody>
       </p:sp>
       <p:sp>
         <p:nvSpPr>
@@ -9351,6 +9583,10 @@
           </a:solidFill>
           <a:ln/>
         </p:spPr>
+        <p:txBody>
+          <a:bodyPr/>
+          <a:p/>
+        </p:txBody>
       </p:sp>
       <p:sp>
         <p:nvSpPr>
@@ -9373,6 +9609,10 @@
           </a:solidFill>
           <a:ln/>
         </p:spPr>
+        <p:txBody>
+          <a:bodyPr/>
+          <a:p/>
+        </p:txBody>
       </p:sp>
       <p:sp>
         <p:nvSpPr>
@@ -9497,6 +9737,10 @@
             <a:prstDash val="solid"/>
           </a:ln>
         </p:spPr>
+        <p:txBody>
+          <a:bodyPr/>
+          <a:p/>
+        </p:txBody>
       </p:sp>
       <p:sp>
         <p:nvSpPr>
@@ -9520,6 +9764,10 @@
             <a:prstDash val="solid"/>
           </a:ln>
         </p:spPr>
+        <p:txBody>
+          <a:bodyPr/>
+          <a:p/>
+        </p:txBody>
       </p:sp>
       <p:sp>
         <p:nvSpPr>
@@ -9581,6 +9829,10 @@
           </a:solidFill>
           <a:ln/>
         </p:spPr>
+        <p:txBody>
+          <a:bodyPr/>
+          <a:p/>
+        </p:txBody>
       </p:sp>
       <p:sp>
         <p:nvSpPr>
@@ -9603,6 +9855,10 @@
           </a:solidFill>
           <a:ln/>
         </p:spPr>
+        <p:txBody>
+          <a:bodyPr/>
+          <a:p/>
+        </p:txBody>
       </p:sp>
       <p:sp>
         <p:nvSpPr>
@@ -9623,6 +9879,10 @@
           </a:solidFill>
           <a:ln/>
         </p:spPr>
+        <p:txBody>
+          <a:bodyPr/>
+          <a:p/>
+        </p:txBody>
       </p:sp>
       <p:sp>
         <p:nvSpPr>
@@ -9643,6 +9903,10 @@
           </a:solidFill>
           <a:ln/>
         </p:spPr>
+        <p:txBody>
+          <a:bodyPr/>
+          <a:p/>
+        </p:txBody>
       </p:sp>
       <p:sp>
         <p:nvSpPr>
@@ -9663,6 +9927,10 @@
           </a:solidFill>
           <a:ln/>
         </p:spPr>
+        <p:txBody>
+          <a:bodyPr/>
+          <a:p/>
+        </p:txBody>
       </p:sp>
       <p:pic>
         <p:nvPicPr>
@@ -10348,6 +10616,10 @@
           </a:solidFill>
           <a:ln/>
         </p:spPr>
+        <p:txBody>
+          <a:bodyPr/>
+          <a:p/>
+        </p:txBody>
       </p:sp>
       <p:sp>
         <p:nvSpPr>
@@ -10370,6 +10642,10 @@
           </a:solidFill>
           <a:ln/>
         </p:spPr>
+        <p:txBody>
+          <a:bodyPr/>
+          <a:p/>
+        </p:txBody>
       </p:sp>
       <p:sp>
         <p:nvSpPr>
@@ -10392,6 +10668,10 @@
           </a:solidFill>
           <a:ln/>
         </p:spPr>
+        <p:txBody>
+          <a:bodyPr/>
+          <a:p/>
+        </p:txBody>
       </p:sp>
       <p:sp>
         <p:nvSpPr>
@@ -10451,6 +10731,10 @@
           </a:solidFill>
           <a:ln/>
         </p:spPr>
+        <p:txBody>
+          <a:bodyPr/>
+          <a:p/>
+        </p:txBody>
       </p:sp>
       <p:sp>
         <p:nvSpPr>
@@ -10471,6 +10755,10 @@
           </a:solidFill>
           <a:ln/>
         </p:spPr>
+        <p:txBody>
+          <a:bodyPr/>
+          <a:p/>
+        </p:txBody>
       </p:sp>
       <p:sp>
         <p:nvSpPr>
@@ -10491,6 +10779,10 @@
           </a:solidFill>
           <a:ln/>
         </p:spPr>
+        <p:txBody>
+          <a:bodyPr/>
+          <a:p/>
+        </p:txBody>
       </p:sp>
       <p:pic>
         <p:nvPicPr>
@@ -10973,6 +11265,10 @@
           </a:solidFill>
           <a:ln/>
         </p:spPr>
+        <p:txBody>
+          <a:bodyPr/>
+          <a:p/>
+        </p:txBody>
       </p:sp>
       <p:sp>
         <p:nvSpPr>
@@ -10995,6 +11291,10 @@
           </a:solidFill>
           <a:ln/>
         </p:spPr>
+        <p:txBody>
+          <a:bodyPr/>
+          <a:p/>
+        </p:txBody>
       </p:sp>
       <p:sp>
         <p:nvSpPr>
@@ -11017,6 +11317,10 @@
           </a:solidFill>
           <a:ln/>
         </p:spPr>
+        <p:txBody>
+          <a:bodyPr/>
+          <a:p/>
+        </p:txBody>
       </p:sp>
       <p:sp>
         <p:nvSpPr>
@@ -11039,6 +11343,10 @@
           </a:solidFill>
           <a:ln/>
         </p:spPr>
+        <p:txBody>
+          <a:bodyPr/>
+          <a:p/>
+        </p:txBody>
       </p:sp>
       <p:sp>
         <p:nvSpPr>
@@ -11098,6 +11406,10 @@
           </a:solidFill>
           <a:ln/>
         </p:spPr>
+        <p:txBody>
+          <a:bodyPr/>
+          <a:p/>
+        </p:txBody>
       </p:sp>
       <p:sp>
         <p:nvSpPr>
@@ -11118,6 +11430,10 @@
           </a:solidFill>
           <a:ln/>
         </p:spPr>
+        <p:txBody>
+          <a:bodyPr/>
+          <a:p/>
+        </p:txBody>
       </p:sp>
       <p:sp>
         <p:nvSpPr>
@@ -11138,6 +11454,10 @@
           </a:solidFill>
           <a:ln/>
         </p:spPr>
+        <p:txBody>
+          <a:bodyPr/>
+          <a:p/>
+        </p:txBody>
       </p:sp>
       <p:sp>
         <p:nvSpPr>
@@ -11273,7 +11593,7 @@
                 <a:ea typeface="Lexend Deca" pitchFamily="34" charset="-122"/>
                 <a:cs typeface="Lexend Deca" pitchFamily="34" charset="-120"/>
               </a:rPr>
-              <a:t>License: CC BY-NC-SA 4.0</a:t>
+              <a:t>© 2026 the authors. The authors license this deck under CC BY-NC-SA 4.0.</a:t>
             </a:r>
             <a:endParaRPr lang="en-US" sz="2000" dirty="0"/>
           </a:p>
@@ -11281,7 +11601,7 @@
       </p:sp>
       <p:sp>
         <p:nvSpPr>
-          <p:cNvPr id="17" name="Independence"/>
+          <p:cNvPr id="17" name="AudioFontCredits"/>
           <p:cNvSpPr/>
           <p:nvPr/>
         </p:nvSpPr>
@@ -11323,7 +11643,7 @@
                 <a:ea typeface="Lexend Deca" pitchFamily="34" charset="-122"/>
                 <a:cs typeface="Lexend Deca" pitchFamily="34" charset="-120"/>
               </a:rPr>
-              <a:t>About</a:t>
+              <a:t>Audio and font</a:t>
             </a:r>
             <a:endParaRPr lang="en-US" sz="2200" dirty="0"/>
           </a:p>
@@ -11343,7 +11663,7 @@
                 <a:ea typeface="Lexend Deca" pitchFamily="34" charset="-122"/>
                 <a:cs typeface="Lexend Deca" pitchFamily="34" charset="-120"/>
               </a:rPr>
-              <a:t>Independent project, not affiliated with or endorsed by Intercambio Uniting Communities.</a:t>
+              <a:t>Audio: Chatterbox TTS (Resemble AI, MIT); AI voices with a Perth watermark. Font: Lexend Deca (OFL 1.1). Provided as-is, without warranty.</a:t>
             </a:r>
             <a:endParaRPr lang="en-US" sz="2000" dirty="0"/>
           </a:p>
@@ -11402,6 +11722,10 @@
           </a:solidFill>
           <a:ln/>
         </p:spPr>
+        <p:txBody>
+          <a:bodyPr/>
+          <a:p/>
+        </p:txBody>
       </p:sp>
       <p:sp>
         <p:nvSpPr>
@@ -11424,6 +11748,10 @@
           </a:solidFill>
           <a:ln/>
         </p:spPr>
+        <p:txBody>
+          <a:bodyPr/>
+          <a:p/>
+        </p:txBody>
       </p:sp>
       <p:sp>
         <p:nvSpPr>
@@ -11451,6 +11779,10 @@
             <a:prstDash val="solid"/>
           </a:ln>
         </p:spPr>
+        <p:txBody>
+          <a:bodyPr/>
+          <a:p/>
+        </p:txBody>
       </p:sp>
       <p:sp>
         <p:nvSpPr>
@@ -11611,6 +11943,10 @@
           </a:solidFill>
           <a:ln/>
         </p:spPr>
+        <p:txBody>
+          <a:bodyPr/>
+          <a:p/>
+        </p:txBody>
       </p:sp>
       <p:sp>
         <p:nvSpPr>
@@ -11631,6 +11967,10 @@
           </a:solidFill>
           <a:ln/>
         </p:spPr>
+        <p:txBody>
+          <a:bodyPr/>
+          <a:p/>
+        </p:txBody>
       </p:sp>
       <p:sp>
         <p:nvSpPr>
@@ -11651,6 +11991,10 @@
           </a:solidFill>
           <a:ln/>
         </p:spPr>
+        <p:txBody>
+          <a:bodyPr/>
+          <a:p/>
+        </p:txBody>
       </p:sp>
       <p:sp>
         <p:nvSpPr>
@@ -12047,6 +12391,10 @@
           </a:solidFill>
           <a:ln/>
         </p:spPr>
+        <p:txBody>
+          <a:bodyPr/>
+          <a:p/>
+        </p:txBody>
       </p:sp>
       <p:sp>
         <p:nvSpPr>
@@ -12069,6 +12417,10 @@
           </a:solidFill>
           <a:ln/>
         </p:spPr>
+        <p:txBody>
+          <a:bodyPr/>
+          <a:p/>
+        </p:txBody>
       </p:sp>
       <p:sp>
         <p:nvSpPr>
@@ -12091,6 +12443,10 @@
           </a:solidFill>
           <a:ln/>
         </p:spPr>
+        <p:txBody>
+          <a:bodyPr/>
+          <a:p/>
+        </p:txBody>
       </p:sp>
       <p:sp>
         <p:nvSpPr>
@@ -12113,6 +12469,10 @@
           </a:solidFill>
           <a:ln/>
         </p:spPr>
+        <p:txBody>
+          <a:bodyPr/>
+          <a:p/>
+        </p:txBody>
       </p:sp>
       <p:sp>
         <p:nvSpPr>
@@ -12135,6 +12495,10 @@
           </a:solidFill>
           <a:ln/>
         </p:spPr>
+        <p:txBody>
+          <a:bodyPr/>
+          <a:p/>
+        </p:txBody>
       </p:sp>
       <p:sp>
         <p:nvSpPr>
@@ -12157,6 +12521,10 @@
           </a:solidFill>
           <a:ln/>
         </p:spPr>
+        <p:txBody>
+          <a:bodyPr/>
+          <a:p/>
+        </p:txBody>
       </p:sp>
       <p:sp>
         <p:nvSpPr>
@@ -12411,6 +12779,10 @@
           </a:solidFill>
           <a:ln/>
         </p:spPr>
+        <p:txBody>
+          <a:bodyPr/>
+          <a:p/>
+        </p:txBody>
       </p:sp>
       <p:sp>
         <p:nvSpPr>
@@ -12470,6 +12842,10 @@
           </a:solidFill>
           <a:ln/>
         </p:spPr>
+        <p:txBody>
+          <a:bodyPr/>
+          <a:p/>
+        </p:txBody>
       </p:sp>
       <p:sp>
         <p:nvSpPr>
@@ -12529,6 +12905,10 @@
           </a:solidFill>
           <a:ln/>
         </p:spPr>
+        <p:txBody>
+          <a:bodyPr/>
+          <a:p/>
+        </p:txBody>
       </p:sp>
       <p:sp>
         <p:nvSpPr>
@@ -12588,6 +12968,10 @@
           </a:solidFill>
           <a:ln/>
         </p:spPr>
+        <p:txBody>
+          <a:bodyPr/>
+          <a:p/>
+        </p:txBody>
       </p:sp>
       <p:sp>
         <p:nvSpPr>
@@ -12647,6 +13031,10 @@
           </a:solidFill>
           <a:ln/>
         </p:spPr>
+        <p:txBody>
+          <a:bodyPr/>
+          <a:p/>
+        </p:txBody>
       </p:sp>
       <p:sp>
         <p:nvSpPr>
@@ -12874,6 +13262,10 @@
           </a:solidFill>
           <a:ln/>
         </p:spPr>
+        <p:txBody>
+          <a:bodyPr/>
+          <a:p/>
+        </p:txBody>
       </p:sp>
       <p:sp>
         <p:nvSpPr>
@@ -12894,6 +13286,10 @@
           </a:solidFill>
           <a:ln/>
         </p:spPr>
+        <p:txBody>
+          <a:bodyPr/>
+          <a:p/>
+        </p:txBody>
       </p:sp>
       <p:sp>
         <p:nvSpPr>
@@ -12914,6 +13310,10 @@
           </a:solidFill>
           <a:ln/>
         </p:spPr>
+        <p:txBody>
+          <a:bodyPr/>
+          <a:p/>
+        </p:txBody>
       </p:sp>
       <p:sp>
         <p:nvSpPr>
@@ -13398,6 +13798,10 @@
           </a:solidFill>
           <a:ln/>
         </p:spPr>
+        <p:txBody>
+          <a:bodyPr/>
+          <a:p/>
+        </p:txBody>
       </p:sp>
       <p:sp>
         <p:nvSpPr>
@@ -13420,6 +13824,10 @@
           </a:solidFill>
           <a:ln/>
         </p:spPr>
+        <p:txBody>
+          <a:bodyPr/>
+          <a:p/>
+        </p:txBody>
       </p:sp>
       <p:sp>
         <p:nvSpPr>
@@ -13442,6 +13850,10 @@
           </a:solidFill>
           <a:ln/>
         </p:spPr>
+        <p:txBody>
+          <a:bodyPr/>
+          <a:p/>
+        </p:txBody>
       </p:sp>
       <p:sp>
         <p:nvSpPr>
@@ -13464,6 +13876,10 @@
           </a:solidFill>
           <a:ln/>
         </p:spPr>
+        <p:txBody>
+          <a:bodyPr/>
+          <a:p/>
+        </p:txBody>
       </p:sp>
       <p:sp>
         <p:nvSpPr>
@@ -13525,6 +13941,10 @@
           </a:solidFill>
           <a:ln/>
         </p:spPr>
+        <p:txBody>
+          <a:bodyPr/>
+          <a:p/>
+        </p:txBody>
       </p:sp>
       <p:sp>
         <p:nvSpPr>
@@ -13545,6 +13965,10 @@
           </a:solidFill>
           <a:ln/>
         </p:spPr>
+        <p:txBody>
+          <a:bodyPr/>
+          <a:p/>
+        </p:txBody>
       </p:sp>
       <p:sp>
         <p:nvSpPr>
@@ -13565,6 +13989,10 @@
           </a:solidFill>
           <a:ln/>
         </p:spPr>
+        <p:txBody>
+          <a:bodyPr/>
+          <a:p/>
+        </p:txBody>
       </p:sp>
       <p:sp>
         <p:nvSpPr>
@@ -13585,6 +14013,10 @@
           </a:solidFill>
           <a:ln/>
         </p:spPr>
+        <p:txBody>
+          <a:bodyPr/>
+          <a:p/>
+        </p:txBody>
       </p:sp>
       <p:sp>
         <p:nvSpPr>
@@ -14717,6 +15149,10 @@
           </a:solidFill>
           <a:ln/>
         </p:spPr>
+        <p:txBody>
+          <a:bodyPr/>
+          <a:p/>
+        </p:txBody>
       </p:sp>
       <p:sp>
         <p:nvSpPr>
@@ -14739,6 +15175,10 @@
           </a:solidFill>
           <a:ln/>
         </p:spPr>
+        <p:txBody>
+          <a:bodyPr/>
+          <a:p/>
+        </p:txBody>
       </p:sp>
       <p:sp>
         <p:nvSpPr>
@@ -14761,6 +15201,10 @@
           </a:solidFill>
           <a:ln/>
         </p:spPr>
+        <p:txBody>
+          <a:bodyPr/>
+          <a:p/>
+        </p:txBody>
       </p:sp>
       <p:sp>
         <p:nvSpPr>
@@ -14783,6 +15227,10 @@
           </a:solidFill>
           <a:ln/>
         </p:spPr>
+        <p:txBody>
+          <a:bodyPr/>
+          <a:p/>
+        </p:txBody>
       </p:sp>
       <p:sp>
         <p:nvSpPr>
@@ -14844,6 +15292,10 @@
           </a:solidFill>
           <a:ln/>
         </p:spPr>
+        <p:txBody>
+          <a:bodyPr/>
+          <a:p/>
+        </p:txBody>
       </p:sp>
       <p:sp>
         <p:nvSpPr>
@@ -14864,6 +15316,10 @@
           </a:solidFill>
           <a:ln/>
         </p:spPr>
+        <p:txBody>
+          <a:bodyPr/>
+          <a:p/>
+        </p:txBody>
       </p:sp>
       <p:sp>
         <p:nvSpPr>
@@ -14884,6 +15340,10 @@
           </a:solidFill>
           <a:ln/>
         </p:spPr>
+        <p:txBody>
+          <a:bodyPr/>
+          <a:p/>
+        </p:txBody>
       </p:sp>
       <p:sp>
         <p:nvSpPr>
@@ -14904,6 +15364,10 @@
           </a:solidFill>
           <a:ln/>
         </p:spPr>
+        <p:txBody>
+          <a:bodyPr/>
+          <a:p/>
+        </p:txBody>
       </p:sp>
       <p:sp>
         <p:nvSpPr>
@@ -16036,6 +16500,10 @@
           </a:solidFill>
           <a:ln/>
         </p:spPr>
+        <p:txBody>
+          <a:bodyPr/>
+          <a:p/>
+        </p:txBody>
       </p:sp>
       <p:sp>
         <p:nvSpPr>
@@ -16058,6 +16526,10 @@
           </a:solidFill>
           <a:ln/>
         </p:spPr>
+        <p:txBody>
+          <a:bodyPr/>
+          <a:p/>
+        </p:txBody>
       </p:sp>
       <p:sp>
         <p:nvSpPr>
@@ -16117,6 +16589,10 @@
           </a:solidFill>
           <a:ln/>
         </p:spPr>
+        <p:txBody>
+          <a:bodyPr/>
+          <a:p/>
+        </p:txBody>
       </p:sp>
       <p:sp>
         <p:nvSpPr>
@@ -16137,6 +16613,10 @@
           </a:solidFill>
           <a:ln/>
         </p:spPr>
+        <p:txBody>
+          <a:bodyPr/>
+          <a:p/>
+        </p:txBody>
       </p:sp>
       <p:sp>
         <p:nvSpPr>
@@ -16157,6 +16637,10 @@
           </a:solidFill>
           <a:ln/>
         </p:spPr>
+        <p:txBody>
+          <a:bodyPr/>
+          <a:p/>
+        </p:txBody>
       </p:sp>
       <p:sp>
         <p:nvSpPr>
@@ -17976,6 +18460,10 @@
           </a:solidFill>
           <a:ln/>
         </p:spPr>
+        <p:txBody>
+          <a:bodyPr/>
+          <a:p/>
+        </p:txBody>
       </p:sp>
       <p:sp>
         <p:nvSpPr>
@@ -17998,6 +18486,10 @@
           </a:solidFill>
           <a:ln/>
         </p:spPr>
+        <p:txBody>
+          <a:bodyPr/>
+          <a:p/>
+        </p:txBody>
       </p:sp>
       <p:sp>
         <p:nvSpPr>
@@ -18020,6 +18512,10 @@
           </a:solidFill>
           <a:ln/>
         </p:spPr>
+        <p:txBody>
+          <a:bodyPr/>
+          <a:p/>
+        </p:txBody>
       </p:sp>
       <p:sp>
         <p:nvSpPr>
@@ -18042,6 +18538,10 @@
           </a:solidFill>
           <a:ln/>
         </p:spPr>
+        <p:txBody>
+          <a:bodyPr/>
+          <a:p/>
+        </p:txBody>
       </p:sp>
       <p:sp>
         <p:nvSpPr>
@@ -18163,6 +18663,10 @@
           </a:solidFill>
           <a:ln/>
         </p:spPr>
+        <p:txBody>
+          <a:bodyPr/>
+          <a:p/>
+        </p:txBody>
       </p:sp>
       <p:sp>
         <p:nvSpPr>
@@ -18183,6 +18687,10 @@
           </a:solidFill>
           <a:ln/>
         </p:spPr>
+        <p:txBody>
+          <a:bodyPr/>
+          <a:p/>
+        </p:txBody>
       </p:sp>
       <p:sp>
         <p:nvSpPr>
@@ -18203,6 +18711,10 @@
           </a:solidFill>
           <a:ln/>
         </p:spPr>
+        <p:txBody>
+          <a:bodyPr/>
+          <a:p/>
+        </p:txBody>
       </p:sp>
       <p:sp>
         <p:nvSpPr>
@@ -19462,6 +19974,10 @@
           </a:solidFill>
           <a:ln/>
         </p:spPr>
+        <p:txBody>
+          <a:bodyPr/>
+          <a:p/>
+        </p:txBody>
       </p:sp>
       <p:sp>
         <p:nvSpPr>
@@ -19484,6 +20000,10 @@
           </a:solidFill>
           <a:ln/>
         </p:spPr>
+        <p:txBody>
+          <a:bodyPr/>
+          <a:p/>
+        </p:txBody>
       </p:sp>
       <p:sp>
         <p:nvSpPr>
@@ -19506,6 +20026,10 @@
           </a:solidFill>
           <a:ln/>
         </p:spPr>
+        <p:txBody>
+          <a:bodyPr/>
+          <a:p/>
+        </p:txBody>
       </p:sp>
       <p:sp>
         <p:nvSpPr>
@@ -19528,6 +20052,10 @@
           </a:solidFill>
           <a:ln/>
         </p:spPr>
+        <p:txBody>
+          <a:bodyPr/>
+          <a:p/>
+        </p:txBody>
       </p:sp>
       <p:sp>
         <p:nvSpPr>
@@ -19550,6 +20078,10 @@
           </a:solidFill>
           <a:ln/>
         </p:spPr>
+        <p:txBody>
+          <a:bodyPr/>
+          <a:p/>
+        </p:txBody>
       </p:sp>
       <p:sp>
         <p:nvSpPr>
@@ -19572,6 +20104,10 @@
           </a:solidFill>
           <a:ln/>
         </p:spPr>
+        <p:txBody>
+          <a:bodyPr/>
+          <a:p/>
+        </p:txBody>
       </p:sp>
       <p:sp>
         <p:nvSpPr>
@@ -19826,6 +20362,10 @@
           </a:solidFill>
           <a:ln/>
         </p:spPr>
+        <p:txBody>
+          <a:bodyPr/>
+          <a:p/>
+        </p:txBody>
       </p:sp>
       <p:sp>
         <p:nvSpPr>
@@ -19885,6 +20425,10 @@
           </a:solidFill>
           <a:ln/>
         </p:spPr>
+        <p:txBody>
+          <a:bodyPr/>
+          <a:p/>
+        </p:txBody>
       </p:sp>
       <p:sp>
         <p:nvSpPr>
@@ -19944,6 +20488,10 @@
           </a:solidFill>
           <a:ln/>
         </p:spPr>
+        <p:txBody>
+          <a:bodyPr/>
+          <a:p/>
+        </p:txBody>
       </p:sp>
       <p:sp>
         <p:nvSpPr>
@@ -20003,6 +20551,10 @@
           </a:solidFill>
           <a:ln/>
         </p:spPr>
+        <p:txBody>
+          <a:bodyPr/>
+          <a:p/>
+        </p:txBody>
       </p:sp>
       <p:sp>
         <p:nvSpPr>
@@ -20062,6 +20614,10 @@
           </a:solidFill>
           <a:ln/>
         </p:spPr>
+        <p:txBody>
+          <a:bodyPr/>
+          <a:p/>
+        </p:txBody>
       </p:sp>
       <p:sp>
         <p:nvSpPr>
@@ -20250,6 +20806,10 @@
           </a:solidFill>
           <a:ln/>
         </p:spPr>
+        <p:txBody>
+          <a:bodyPr/>
+          <a:p/>
+        </p:txBody>
       </p:sp>
       <p:sp>
         <p:nvSpPr>
@@ -20270,6 +20830,10 @@
           </a:solidFill>
           <a:ln/>
         </p:spPr>
+        <p:txBody>
+          <a:bodyPr/>
+          <a:p/>
+        </p:txBody>
       </p:sp>
       <p:sp>
         <p:nvSpPr>
@@ -20290,6 +20854,10 @@
           </a:solidFill>
           <a:ln/>
         </p:spPr>
+        <p:txBody>
+          <a:bodyPr/>
+          <a:p/>
+        </p:txBody>
       </p:sp>
       <p:sp>
         <p:nvSpPr>
@@ -20774,6 +21342,10 @@
           </a:solidFill>
           <a:ln/>
         </p:spPr>
+        <p:txBody>
+          <a:bodyPr/>
+          <a:p/>
+        </p:txBody>
       </p:sp>
       <p:sp>
         <p:nvSpPr>
@@ -20796,6 +21368,10 @@
           </a:solidFill>
           <a:ln/>
         </p:spPr>
+        <p:txBody>
+          <a:bodyPr/>
+          <a:p/>
+        </p:txBody>
       </p:sp>
       <p:sp>
         <p:nvSpPr>
@@ -20823,6 +21399,10 @@
             <a:prstDash val="solid"/>
           </a:ln>
         </p:spPr>
+        <p:txBody>
+          <a:bodyPr/>
+          <a:p/>
+        </p:txBody>
       </p:sp>
       <p:sp>
         <p:nvSpPr>
@@ -20983,6 +21563,10 @@
           </a:solidFill>
           <a:ln/>
         </p:spPr>
+        <p:txBody>
+          <a:bodyPr/>
+          <a:p/>
+        </p:txBody>
       </p:sp>
       <p:sp>
         <p:nvSpPr>
@@ -21003,6 +21587,10 @@
           </a:solidFill>
           <a:ln/>
         </p:spPr>
+        <p:txBody>
+          <a:bodyPr/>
+          <a:p/>
+        </p:txBody>
       </p:sp>
       <p:sp>
         <p:nvSpPr>
@@ -21023,6 +21611,10 @@
           </a:solidFill>
           <a:ln/>
         </p:spPr>
+        <p:txBody>
+          <a:bodyPr/>
+          <a:p/>
+        </p:txBody>
       </p:sp>
       <p:pic>
         <p:nvPicPr>
